--- a/260418_add/supplefigure_260420/SuppFig_S09_GEO_cohorts_CONSORT.pptx
+++ b/260418_add/supplefigure_260420/SuppFig_S09_GEO_cohorts_CONSORT.pptx
@@ -3156,7 +3156,7 @@
                 </a:solidFill>
                 <a:latin typeface="Arial"/>
               </a:rPr>
-              <a:t>9 GEO nCRT cohorts — inclusion / exclusion matrix (primary meta 5 of 9)</a:t>
+              <a:t>9 GEO nCRT cohorts — inclusion / exclusion matrix (primary meta 5 of 9; concordance ≥ 3/4 rule)</a:t>
             </a:r>
           </a:p>
         </p:txBody>
@@ -8077,7 +8077,7 @@
                 </a:solidFill>
                 <a:latin typeface="Arial"/>
               </a:rPr>
-              <a:t>excluded (1/4 discordant)</a:t>
+              <a:t>excluded (1/4 discord)</a:t>
             </a:r>
           </a:p>
         </p:txBody>
@@ -8091,7 +8091,7 @@
         <p:spPr>
           <a:xfrm>
             <a:off x="548640" y="6263640"/>
-            <a:ext cx="11155680" cy="320040"/>
+            <a:ext cx="11155680" cy="274320"/>
           </a:xfrm>
           <a:prstGeom prst="rect">
             <a:avLst/>
@@ -8113,7 +8113,7 @@
                 </a:solidFill>
                 <a:latin typeface="Arial"/>
               </a:rPr>
-              <a:t>Restricted meta (5 cohorts, N = 518) selected by objective ≥ 3 / 4 Thread-1-concordance rule BEFORE Z computation; four excluded on independent regimen / endpoint grounds.</a:t>
+              <a:t>Primary meta (5 cohorts, N = 518) selected by objective ≥ 3 / 4 Thread-1-concordance rule BEFORE Z computation.</a:t>
             </a:r>
           </a:p>
         </p:txBody>
@@ -8203,7 +8203,7 @@
                 </a:solidFill>
                 <a:latin typeface="Arial"/>
               </a:rPr>
-              <a:t>External-validation CONSORT: 9 candidate cohorts → 5 primary meta</a:t>
+              <a:t>External-validation CONSORT — 9 → 5 primary meta (flow-width ∝ N)</a:t>
             </a:r>
           </a:p>
         </p:txBody>
@@ -8217,7 +8217,7 @@
         <p:spPr>
           <a:xfrm>
             <a:off x="4389120" y="1005840"/>
-            <a:ext cx="3383280" cy="731520"/>
+            <a:ext cx="3383280" cy="777240"/>
           </a:xfrm>
           <a:prstGeom prst="rect">
             <a:avLst/>
@@ -8279,109 +8279,27 @@
           <a:p>
             <a:pPr algn="ctr"/>
             <a:r>
-              <a:rPr sz="1000" b="1" i="0">
+              <a:rPr sz="1100" b="1" i="0">
                 <a:solidFill>
                   <a:srgbClr val="222222"/>
                 </a:solidFill>
                 <a:latin typeface="Arial"/>
               </a:rPr>
-              <a:t>9 GEO nCRT cohorts with response labels (N = 721)</a:t>
-            </a:r>
-          </a:p>
-        </p:txBody>
-      </p:sp>
-      <p:cxnSp>
-        <p:nvCxnSpPr>
-          <p:cNvPr id="6" name="Connector 5"/>
-          <p:cNvCxnSpPr/>
-          <p:nvPr/>
-        </p:nvCxnSpPr>
-        <p:spPr>
-          <a:xfrm>
-            <a:off x="6080760" y="1737360"/>
-            <a:ext cx="0" cy="457200"/>
-          </a:xfrm>
-          <a:prstGeom prst="line">
-            <a:avLst/>
-          </a:prstGeom>
-          <a:ln w="19050">
-            <a:solidFill>
-              <a:srgbClr val="222222"/>
-            </a:solidFill>
-          </a:ln>
-          <a:effectLst/>
-        </p:spPr>
-        <p:style>
-          <a:lnRef idx="2">
-            <a:schemeClr val="accent1"/>
-          </a:lnRef>
-          <a:fillRef idx="0">
-            <a:schemeClr val="accent1"/>
-          </a:fillRef>
-          <a:effectRef idx="1">
-            <a:schemeClr val="accent1"/>
-          </a:effectRef>
-          <a:fontRef idx="minor">
-            <a:schemeClr val="tx1"/>
-          </a:fontRef>
-        </p:style>
-      </p:cxnSp>
-      <p:sp>
-        <p:nvSpPr>
-          <p:cNvPr id="7" name="Rectangle 6"/>
-          <p:cNvSpPr/>
-          <p:nvPr/>
-        </p:nvSpPr>
-        <p:spPr>
-          <a:xfrm>
-            <a:off x="1371600" y="2194560"/>
-            <a:ext cx="4389120" cy="2560320"/>
-          </a:xfrm>
-          <a:prstGeom prst="rect">
-            <a:avLst/>
-          </a:prstGeom>
-          <a:solidFill>
-            <a:srgbClr val="9FC9BE"/>
-          </a:solidFill>
-          <a:ln w="12700">
-            <a:solidFill>
-              <a:srgbClr val="222222"/>
-            </a:solidFill>
-          </a:ln>
-          <a:effectLst/>
-        </p:spPr>
-        <p:style>
-          <a:lnRef idx="1">
-            <a:schemeClr val="accent1"/>
-          </a:lnRef>
-          <a:fillRef idx="3">
-            <a:schemeClr val="accent1"/>
-          </a:fillRef>
-          <a:effectRef idx="2">
-            <a:schemeClr val="accent1"/>
-          </a:effectRef>
-          <a:fontRef idx="minor">
-            <a:schemeClr val="lt1"/>
-          </a:fontRef>
-        </p:style>
-        <p:txBody>
-          <a:bodyPr rtlCol="0" anchor="ctr"/>
-          <a:lstStyle/>
-          <a:p>
-            <a:pPr algn="ctr"/>
-          </a:p>
-        </p:txBody>
-      </p:sp>
-      <p:sp>
-        <p:nvSpPr>
-          <p:cNvPr id="8" name="TextBox 7"/>
+              <a:t>9 candidate GEO nCRT cohorts</a:t>
+            </a:r>
+          </a:p>
+        </p:txBody>
+      </p:sp>
+      <p:sp>
+        <p:nvSpPr>
+          <p:cNvPr id="6" name="TextBox 5"/>
           <p:cNvSpPr txBox="1"/>
           <p:nvPr/>
         </p:nvSpPr>
         <p:spPr>
           <a:xfrm>
-            <a:off x="1444752" y="2267712"/>
-            <a:ext cx="4242816" cy="256032"/>
+            <a:off x="4462272" y="1335024"/>
+            <a:ext cx="3236976" cy="256032"/>
           </a:xfrm>
           <a:prstGeom prst="rect">
             <a:avLst/>
@@ -8397,690 +8315,32 @@
           <a:p>
             <a:pPr algn="ctr"/>
             <a:r>
-              <a:rPr sz="1000" b="1" i="0">
+              <a:rPr sz="900" b="0" i="0">
                 <a:solidFill>
                   <a:srgbClr val="222222"/>
                 </a:solidFill>
                 <a:latin typeface="Arial"/>
               </a:rPr>
-              <a:t>Primary meta (N = 518)</a:t>
-            </a:r>
-          </a:p>
-        </p:txBody>
-      </p:sp>
-      <p:sp>
-        <p:nvSpPr>
-          <p:cNvPr id="9" name="TextBox 8"/>
-          <p:cNvSpPr txBox="1"/>
-          <p:nvPr/>
-        </p:nvSpPr>
-        <p:spPr>
-          <a:xfrm>
-            <a:off x="1444752" y="2523744"/>
-            <a:ext cx="4242816" cy="256032"/>
-          </a:xfrm>
-          <a:prstGeom prst="rect">
-            <a:avLst/>
-          </a:prstGeom>
-          <a:noFill/>
-          <a:effectLst/>
-        </p:spPr>
-        <p:txBody>
-          <a:bodyPr wrap="square" lIns="0" rIns="0" tIns="0" bIns="0" anchor="ctr">
-            <a:spAutoFit/>
-          </a:bodyPr>
-          <a:lstStyle/>
-          <a:p>
-            <a:pPr algn="ctr"/>
-            <a:r>
-              <a:rPr sz="900" b="0" i="0">
-                <a:solidFill>
-                  <a:srgbClr val="222222"/>
-                </a:solidFill>
-                <a:latin typeface="Arial"/>
-              </a:rPr>
-              <a:t>5 LC-CRT cohorts with concurrent capecitabine</a:t>
-            </a:r>
-          </a:p>
-        </p:txBody>
-      </p:sp>
-      <p:sp>
-        <p:nvSpPr>
-          <p:cNvPr id="10" name="TextBox 9"/>
-          <p:cNvSpPr txBox="1"/>
-          <p:nvPr/>
-        </p:nvSpPr>
-        <p:spPr>
-          <a:xfrm>
-            <a:off x="1444752" y="2779776"/>
-            <a:ext cx="4242816" cy="256032"/>
-          </a:xfrm>
-          <a:prstGeom prst="rect">
-            <a:avLst/>
-          </a:prstGeom>
-          <a:noFill/>
-          <a:effectLst/>
-        </p:spPr>
-        <p:txBody>
-          <a:bodyPr wrap="square" lIns="0" rIns="0" tIns="0" bIns="0" anchor="ctr">
-            <a:spAutoFit/>
-          </a:bodyPr>
-          <a:lstStyle/>
-          <a:p>
-            <a:pPr algn="ctr"/>
-            <a:r>
-              <a:rPr sz="900" b="0" i="0">
-                <a:solidFill>
-                  <a:srgbClr val="222222"/>
-                </a:solidFill>
-                <a:latin typeface="Arial"/>
-              </a:rPr>
-              <a:t>≥ 3 / 4 Thread-1 signature concordance</a:t>
-            </a:r>
-          </a:p>
-        </p:txBody>
-      </p:sp>
-      <p:sp>
-        <p:nvSpPr>
-          <p:cNvPr id="11" name="TextBox 10"/>
-          <p:cNvSpPr txBox="1"/>
-          <p:nvPr/>
-        </p:nvSpPr>
-        <p:spPr>
-          <a:xfrm>
-            <a:off x="1444752" y="3035808"/>
-            <a:ext cx="4242816" cy="256032"/>
-          </a:xfrm>
-          <a:prstGeom prst="rect">
-            <a:avLst/>
-          </a:prstGeom>
-          <a:noFill/>
-          <a:effectLst/>
-        </p:spPr>
-        <p:txBody>
-          <a:bodyPr wrap="square" lIns="0" rIns="0" tIns="0" bIns="0" anchor="ctr">
-            <a:spAutoFit/>
-          </a:bodyPr>
-          <a:lstStyle/>
-          <a:p>
-            <a:pPr algn="ctr"/>
-            <a:r>
-              <a:rPr sz="900" b="0" i="0">
-                <a:solidFill>
-                  <a:srgbClr val="222222"/>
-                </a:solidFill>
-                <a:latin typeface="Arial"/>
-              </a:rPr>
-              <a:t>GSE35452 (N=46), GSE45404 (80),</a:t>
-            </a:r>
-          </a:p>
-        </p:txBody>
-      </p:sp>
-      <p:sp>
-        <p:nvSpPr>
-          <p:cNvPr id="12" name="TextBox 11"/>
-          <p:cNvSpPr txBox="1"/>
-          <p:nvPr/>
-        </p:nvSpPr>
-        <p:spPr>
-          <a:xfrm>
-            <a:off x="1444752" y="3291840"/>
-            <a:ext cx="4242816" cy="256032"/>
-          </a:xfrm>
-          <a:prstGeom prst="rect">
-            <a:avLst/>
-          </a:prstGeom>
-          <a:noFill/>
-          <a:effectLst/>
-        </p:spPr>
-        <p:txBody>
-          <a:bodyPr wrap="square" lIns="0" rIns="0" tIns="0" bIns="0" anchor="ctr">
-            <a:spAutoFit/>
-          </a:bodyPr>
-          <a:lstStyle/>
-          <a:p>
-            <a:pPr algn="ctr"/>
-            <a:r>
-              <a:rPr sz="900" b="0" i="0">
-                <a:solidFill>
-                  <a:srgbClr val="222222"/>
-                </a:solidFill>
-                <a:latin typeface="Arial"/>
-              </a:rPr>
-              <a:t>GSE56699 (72), GSE133057 (33),</a:t>
-            </a:r>
-          </a:p>
-        </p:txBody>
-      </p:sp>
-      <p:sp>
-        <p:nvSpPr>
-          <p:cNvPr id="13" name="TextBox 12"/>
-          <p:cNvSpPr txBox="1"/>
-          <p:nvPr/>
-        </p:nvSpPr>
-        <p:spPr>
-          <a:xfrm>
-            <a:off x="1444752" y="3547872"/>
-            <a:ext cx="4242816" cy="256032"/>
-          </a:xfrm>
-          <a:prstGeom prst="rect">
-            <a:avLst/>
-          </a:prstGeom>
-          <a:noFill/>
-          <a:effectLst/>
-        </p:spPr>
-        <p:txBody>
-          <a:bodyPr wrap="square" lIns="0" rIns="0" tIns="0" bIns="0" anchor="ctr">
-            <a:spAutoFit/>
-          </a:bodyPr>
-          <a:lstStyle/>
-          <a:p>
-            <a:pPr algn="ctr"/>
-            <a:r>
-              <a:rPr sz="900" b="0" i="0">
-                <a:solidFill>
-                  <a:srgbClr val="222222"/>
-                </a:solidFill>
-                <a:latin typeface="Arial"/>
-              </a:rPr>
-              <a:t>GSE87211 (287)</a:t>
-            </a:r>
-          </a:p>
-        </p:txBody>
-      </p:sp>
-      <p:sp>
-        <p:nvSpPr>
-          <p:cNvPr id="14" name="TextBox 13"/>
-          <p:cNvSpPr txBox="1"/>
-          <p:nvPr/>
-        </p:nvSpPr>
-        <p:spPr>
-          <a:xfrm>
-            <a:off x="1444752" y="3803904"/>
-            <a:ext cx="4242816" cy="256032"/>
-          </a:xfrm>
-          <a:prstGeom prst="rect">
-            <a:avLst/>
-          </a:prstGeom>
-          <a:noFill/>
-          <a:effectLst/>
-        </p:spPr>
-        <p:txBody>
-          <a:bodyPr wrap="square" lIns="0" rIns="0" tIns="0" bIns="0" anchor="ctr">
-            <a:spAutoFit/>
-          </a:bodyPr>
-          <a:lstStyle/>
-          <a:p>
-            <a:pPr algn="ctr"/>
-            <a:r>
-              <a:rPr sz="900" b="0" i="0">
-                <a:solidFill>
-                  <a:srgbClr val="222222"/>
-                </a:solidFill>
-                <a:latin typeface="Arial"/>
-              </a:rPr>
-              <a:t/>
-            </a:r>
-          </a:p>
-        </p:txBody>
-      </p:sp>
-      <p:sp>
-        <p:nvSpPr>
-          <p:cNvPr id="15" name="TextBox 14"/>
-          <p:cNvSpPr txBox="1"/>
-          <p:nvPr/>
-        </p:nvSpPr>
-        <p:spPr>
-          <a:xfrm>
-            <a:off x="1444752" y="4059936"/>
-            <a:ext cx="4242816" cy="256032"/>
-          </a:xfrm>
-          <a:prstGeom prst="rect">
-            <a:avLst/>
-          </a:prstGeom>
-          <a:noFill/>
-          <a:effectLst/>
-        </p:spPr>
-        <p:txBody>
-          <a:bodyPr wrap="square" lIns="0" rIns="0" tIns="0" bIns="0" anchor="ctr">
-            <a:spAutoFit/>
-          </a:bodyPr>
-          <a:lstStyle/>
-          <a:p>
-            <a:pPr algn="ctr"/>
-            <a:r>
-              <a:rPr sz="900" b="0" i="0">
-                <a:solidFill>
-                  <a:srgbClr val="222222"/>
-                </a:solidFill>
-                <a:latin typeface="Arial"/>
-              </a:rPr>
-              <a:t>Restricted Z = +3.17 DSB, +3.21 cellcycle,</a:t>
-            </a:r>
-          </a:p>
-        </p:txBody>
-      </p:sp>
-      <p:sp>
-        <p:nvSpPr>
-          <p:cNvPr id="16" name="TextBox 15"/>
-          <p:cNvSpPr txBox="1"/>
-          <p:nvPr/>
-        </p:nvSpPr>
-        <p:spPr>
-          <a:xfrm>
-            <a:off x="1444752" y="4315968"/>
-            <a:ext cx="4242816" cy="256032"/>
-          </a:xfrm>
-          <a:prstGeom prst="rect">
-            <a:avLst/>
-          </a:prstGeom>
-          <a:noFill/>
-          <a:effectLst/>
-        </p:spPr>
-        <p:txBody>
-          <a:bodyPr wrap="square" lIns="0" rIns="0" tIns="0" bIns="0" anchor="ctr">
-            <a:spAutoFit/>
-          </a:bodyPr>
-          <a:lstStyle/>
-          <a:p>
-            <a:pPr algn="ctr"/>
-            <a:r>
-              <a:rPr sz="900" b="0" i="0">
-                <a:solidFill>
-                  <a:srgbClr val="222222"/>
-                </a:solidFill>
-                <a:latin typeface="Arial"/>
-              </a:rPr>
-              <a:t>+2.79 E2F/MYC</a:t>
-            </a:r>
-          </a:p>
-        </p:txBody>
-      </p:sp>
-      <p:sp>
-        <p:nvSpPr>
-          <p:cNvPr id="17" name="Rectangle 16"/>
-          <p:cNvSpPr/>
-          <p:nvPr/>
-        </p:nvSpPr>
-        <p:spPr>
-          <a:xfrm>
-            <a:off x="6400800" y="2194560"/>
-            <a:ext cx="4572000" cy="2560320"/>
-          </a:xfrm>
-          <a:prstGeom prst="rect">
-            <a:avLst/>
-          </a:prstGeom>
-          <a:solidFill>
-            <a:srgbClr val="E9AE9B"/>
-          </a:solidFill>
-          <a:ln w="12700">
-            <a:solidFill>
-              <a:srgbClr val="222222"/>
-            </a:solidFill>
-          </a:ln>
-          <a:effectLst/>
-        </p:spPr>
-        <p:style>
-          <a:lnRef idx="1">
-            <a:schemeClr val="accent1"/>
-          </a:lnRef>
-          <a:fillRef idx="3">
-            <a:schemeClr val="accent1"/>
-          </a:fillRef>
-          <a:effectRef idx="2">
-            <a:schemeClr val="accent1"/>
-          </a:effectRef>
-          <a:fontRef idx="minor">
-            <a:schemeClr val="lt1"/>
-          </a:fontRef>
-        </p:style>
-        <p:txBody>
-          <a:bodyPr rtlCol="0" anchor="ctr"/>
-          <a:lstStyle/>
-          <a:p>
-            <a:pPr algn="ctr"/>
-          </a:p>
-        </p:txBody>
-      </p:sp>
-      <p:sp>
-        <p:nvSpPr>
-          <p:cNvPr id="18" name="TextBox 17"/>
-          <p:cNvSpPr txBox="1"/>
-          <p:nvPr/>
-        </p:nvSpPr>
-        <p:spPr>
-          <a:xfrm>
-            <a:off x="6473952" y="2267712"/>
-            <a:ext cx="4425696" cy="256032"/>
-          </a:xfrm>
-          <a:prstGeom prst="rect">
-            <a:avLst/>
-          </a:prstGeom>
-          <a:noFill/>
-          <a:effectLst/>
-        </p:spPr>
-        <p:txBody>
-          <a:bodyPr wrap="square" lIns="0" rIns="0" tIns="0" bIns="0" anchor="ctr">
-            <a:spAutoFit/>
-          </a:bodyPr>
-          <a:lstStyle/>
-          <a:p>
-            <a:pPr algn="ctr"/>
-            <a:r>
-              <a:rPr sz="1000" b="1" i="0">
-                <a:solidFill>
-                  <a:srgbClr val="222222"/>
-                </a:solidFill>
-                <a:latin typeface="Arial"/>
-              </a:rPr>
-              <a:t>Excluded (N = 203)</a:t>
-            </a:r>
-          </a:p>
-        </p:txBody>
-      </p:sp>
-      <p:sp>
-        <p:nvSpPr>
-          <p:cNvPr id="19" name="TextBox 18"/>
-          <p:cNvSpPr txBox="1"/>
-          <p:nvPr/>
-        </p:nvSpPr>
-        <p:spPr>
-          <a:xfrm>
-            <a:off x="6473952" y="2523744"/>
-            <a:ext cx="4425696" cy="256032"/>
-          </a:xfrm>
-          <a:prstGeom prst="rect">
-            <a:avLst/>
-          </a:prstGeom>
-          <a:noFill/>
-          <a:effectLst/>
-        </p:spPr>
-        <p:txBody>
-          <a:bodyPr wrap="square" lIns="0" rIns="0" tIns="0" bIns="0" anchor="ctr">
-            <a:spAutoFit/>
-          </a:bodyPr>
-          <a:lstStyle/>
-          <a:p>
-            <a:pPr algn="ctr"/>
-            <a:r>
-              <a:rPr sz="900" b="0" i="0">
-                <a:solidFill>
-                  <a:srgbClr val="222222"/>
-                </a:solidFill>
-                <a:latin typeface="Arial"/>
-              </a:rPr>
-              <a:t/>
-            </a:r>
-          </a:p>
-        </p:txBody>
-      </p:sp>
-      <p:sp>
-        <p:nvSpPr>
-          <p:cNvPr id="20" name="TextBox 19"/>
-          <p:cNvSpPr txBox="1"/>
-          <p:nvPr/>
-        </p:nvSpPr>
-        <p:spPr>
-          <a:xfrm>
-            <a:off x="6473952" y="2779776"/>
-            <a:ext cx="4425696" cy="256032"/>
-          </a:xfrm>
-          <a:prstGeom prst="rect">
-            <a:avLst/>
-          </a:prstGeom>
-          <a:noFill/>
-          <a:effectLst/>
-        </p:spPr>
-        <p:txBody>
-          <a:bodyPr wrap="square" lIns="0" rIns="0" tIns="0" bIns="0" anchor="ctr">
-            <a:spAutoFit/>
-          </a:bodyPr>
-          <a:lstStyle/>
-          <a:p>
-            <a:pPr algn="ctr"/>
-            <a:r>
-              <a:rPr sz="900" b="0" i="0">
-                <a:solidFill>
-                  <a:srgbClr val="222222"/>
-                </a:solidFill>
-                <a:latin typeface="Arial"/>
-              </a:rPr>
-              <a:t>GSE119409 (N=66): radiotherapy alone, no chemo</a:t>
-            </a:r>
-          </a:p>
-        </p:txBody>
-      </p:sp>
-      <p:sp>
-        <p:nvSpPr>
-          <p:cNvPr id="21" name="TextBox 20"/>
-          <p:cNvSpPr txBox="1"/>
-          <p:nvPr/>
-        </p:nvSpPr>
-        <p:spPr>
-          <a:xfrm>
-            <a:off x="6473952" y="3035808"/>
-            <a:ext cx="4425696" cy="256032"/>
-          </a:xfrm>
-          <a:prstGeom prst="rect">
-            <a:avLst/>
-          </a:prstGeom>
-          <a:noFill/>
-          <a:effectLst/>
-        </p:spPr>
-        <p:txBody>
-          <a:bodyPr wrap="square" lIns="0" rIns="0" tIns="0" bIns="0" anchor="ctr">
-            <a:spAutoFit/>
-          </a:bodyPr>
-          <a:lstStyle/>
-          <a:p>
-            <a:pPr algn="ctr"/>
-            <a:r>
-              <a:rPr sz="900" b="0" i="0">
-                <a:solidFill>
-                  <a:srgbClr val="222222"/>
-                </a:solidFill>
-                <a:latin typeface="Arial"/>
-              </a:rPr>
-              <a:t>GSE94104 (80): CMS paper, no response endpoint</a:t>
-            </a:r>
-          </a:p>
-        </p:txBody>
-      </p:sp>
-      <p:sp>
-        <p:nvSpPr>
-          <p:cNvPr id="22" name="TextBox 21"/>
-          <p:cNvSpPr txBox="1"/>
-          <p:nvPr/>
-        </p:nvSpPr>
-        <p:spPr>
-          <a:xfrm>
-            <a:off x="6473952" y="3291840"/>
-            <a:ext cx="4425696" cy="256032"/>
-          </a:xfrm>
-          <a:prstGeom prst="rect">
-            <a:avLst/>
-          </a:prstGeom>
-          <a:noFill/>
-          <a:effectLst/>
-        </p:spPr>
-        <p:txBody>
-          <a:bodyPr wrap="square" lIns="0" rIns="0" tIns="0" bIns="0" anchor="ctr">
-            <a:spAutoFit/>
-          </a:bodyPr>
-          <a:lstStyle/>
-          <a:p>
-            <a:pPr algn="ctr"/>
-            <a:r>
-              <a:rPr sz="900" b="0" i="0">
-                <a:solidFill>
-                  <a:srgbClr val="222222"/>
-                </a:solidFill>
-                <a:latin typeface="Arial"/>
-              </a:rPr>
-              <a:t>GSE150082 (39): SC-RT + TNT subset, opposite biology</a:t>
-            </a:r>
-          </a:p>
-        </p:txBody>
-      </p:sp>
-      <p:sp>
-        <p:nvSpPr>
-          <p:cNvPr id="23" name="TextBox 22"/>
-          <p:cNvSpPr txBox="1"/>
-          <p:nvPr/>
-        </p:nvSpPr>
-        <p:spPr>
-          <a:xfrm>
-            <a:off x="6473952" y="3547872"/>
-            <a:ext cx="4425696" cy="256032"/>
-          </a:xfrm>
-          <a:prstGeom prst="rect">
-            <a:avLst/>
-          </a:prstGeom>
-          <a:noFill/>
-          <a:effectLst/>
-        </p:spPr>
-        <p:txBody>
-          <a:bodyPr wrap="square" lIns="0" rIns="0" tIns="0" bIns="0" anchor="ctr">
-            <a:spAutoFit/>
-          </a:bodyPr>
-          <a:lstStyle/>
-          <a:p>
-            <a:pPr algn="ctr"/>
-            <a:r>
-              <a:rPr sz="900" b="0" i="0">
-                <a:solidFill>
-                  <a:srgbClr val="222222"/>
-                </a:solidFill>
-                <a:latin typeface="Arial"/>
-              </a:rPr>
-              <a:t>GSE46862 (69): TRG ambiguous, 1/4 Thread-1</a:t>
-            </a:r>
-          </a:p>
-        </p:txBody>
-      </p:sp>
-      <p:sp>
-        <p:nvSpPr>
-          <p:cNvPr id="24" name="TextBox 23"/>
-          <p:cNvSpPr txBox="1"/>
-          <p:nvPr/>
-        </p:nvSpPr>
-        <p:spPr>
-          <a:xfrm>
-            <a:off x="6473952" y="3803904"/>
-            <a:ext cx="4425696" cy="256032"/>
-          </a:xfrm>
-          <a:prstGeom prst="rect">
-            <a:avLst/>
-          </a:prstGeom>
-          <a:noFill/>
-          <a:effectLst/>
-        </p:spPr>
-        <p:txBody>
-          <a:bodyPr wrap="square" lIns="0" rIns="0" tIns="0" bIns="0" anchor="ctr">
-            <a:spAutoFit/>
-          </a:bodyPr>
-          <a:lstStyle/>
-          <a:p>
-            <a:pPr algn="ctr"/>
-            <a:r>
-              <a:rPr sz="900" b="0" i="0">
-                <a:solidFill>
-                  <a:srgbClr val="222222"/>
-                </a:solidFill>
-                <a:latin typeface="Arial"/>
-              </a:rPr>
-              <a:t/>
-            </a:r>
-          </a:p>
-        </p:txBody>
-      </p:sp>
-      <p:sp>
-        <p:nvSpPr>
-          <p:cNvPr id="25" name="TextBox 24"/>
-          <p:cNvSpPr txBox="1"/>
-          <p:nvPr/>
-        </p:nvSpPr>
-        <p:spPr>
-          <a:xfrm>
-            <a:off x="6473952" y="4059936"/>
-            <a:ext cx="4425696" cy="256032"/>
-          </a:xfrm>
-          <a:prstGeom prst="rect">
-            <a:avLst/>
-          </a:prstGeom>
-          <a:noFill/>
-          <a:effectLst/>
-        </p:spPr>
-        <p:txBody>
-          <a:bodyPr wrap="square" lIns="0" rIns="0" tIns="0" bIns="0" anchor="ctr">
-            <a:spAutoFit/>
-          </a:bodyPr>
-          <a:lstStyle/>
-          <a:p>
-            <a:pPr algn="ctr"/>
-            <a:r>
-              <a:rPr sz="900" b="0" i="0">
-                <a:solidFill>
-                  <a:srgbClr val="222222"/>
-                </a:solidFill>
-                <a:latin typeface="Arial"/>
-              </a:rPr>
-              <a:t>Full 9-cohort sensitivity meta shown in</a:t>
-            </a:r>
-          </a:p>
-        </p:txBody>
-      </p:sp>
-      <p:sp>
-        <p:nvSpPr>
-          <p:cNvPr id="26" name="TextBox 25"/>
-          <p:cNvSpPr txBox="1"/>
-          <p:nvPr/>
-        </p:nvSpPr>
-        <p:spPr>
-          <a:xfrm>
-            <a:off x="6473952" y="4315968"/>
-            <a:ext cx="4425696" cy="256032"/>
-          </a:xfrm>
-          <a:prstGeom prst="rect">
-            <a:avLst/>
-          </a:prstGeom>
-          <a:noFill/>
-          <a:effectLst/>
-        </p:spPr>
-        <p:txBody>
-          <a:bodyPr wrap="square" lIns="0" rIns="0" tIns="0" bIns="0" anchor="ctr">
-            <a:spAutoFit/>
-          </a:bodyPr>
-          <a:lstStyle/>
-          <a:p>
-            <a:pPr algn="ctr"/>
-            <a:r>
-              <a:rPr sz="900" b="0" i="0">
-                <a:solidFill>
-                  <a:srgbClr val="222222"/>
-                </a:solidFill>
-                <a:latin typeface="Arial"/>
-              </a:rPr>
-              <a:t>Supp Fig S19A (hollow diamond)</a:t>
+              <a:t>N_total = 721 samples</a:t>
             </a:r>
           </a:p>
         </p:txBody>
       </p:sp>
       <p:cxnSp>
         <p:nvCxnSpPr>
-          <p:cNvPr id="27" name="Connector 26"/>
+          <p:cNvPr id="7" name="Connector 6"/>
           <p:cNvCxnSpPr/>
           <p:nvPr/>
         </p:nvCxnSpPr>
         <p:spPr>
-          <a:xfrm flipH="1">
-            <a:off x="3566160" y="1737360"/>
-            <a:ext cx="2514600" cy="457200"/>
+          <a:xfrm>
+            <a:off x="6080760" y="1783080"/>
+            <a:ext cx="0" cy="411480"/>
           </a:xfrm>
           <a:prstGeom prst="line">
             <a:avLst/>
           </a:prstGeom>
-          <a:ln w="12700">
+          <a:ln w="31750">
             <a:solidFill>
               <a:srgbClr val="222222"/>
             </a:solidFill>
@@ -9104,21 +8364,21 @@
       </p:cxnSp>
       <p:cxnSp>
         <p:nvCxnSpPr>
-          <p:cNvPr id="28" name="Connector 27"/>
+          <p:cNvPr id="8" name="Connector 7"/>
           <p:cNvCxnSpPr/>
           <p:nvPr/>
         </p:nvCxnSpPr>
         <p:spPr>
-          <a:xfrm>
-            <a:off x="6080760" y="1737360"/>
-            <a:ext cx="2606040" cy="457200"/>
+          <a:xfrm flipH="1">
+            <a:off x="3566160" y="1828800"/>
+            <a:ext cx="2514600" cy="365760"/>
           </a:xfrm>
           <a:prstGeom prst="line">
             <a:avLst/>
           </a:prstGeom>
-          <a:ln w="12700">
+          <a:ln w="45621">
             <a:solidFill>
-              <a:srgbClr val="222222"/>
+              <a:srgbClr val="0A7D6E"/>
             </a:solidFill>
           </a:ln>
           <a:effectLst/>
@@ -9138,9 +8398,1021 @@
           </a:fontRef>
         </p:style>
       </p:cxnSp>
-      <p:sp>
-        <p:nvSpPr>
-          <p:cNvPr id="29" name="Rectangle 28"/>
+      <p:cxnSp>
+        <p:nvCxnSpPr>
+          <p:cNvPr id="9" name="Connector 8"/>
+          <p:cNvCxnSpPr/>
+          <p:nvPr/>
+        </p:nvCxnSpPr>
+        <p:spPr>
+          <a:xfrm>
+            <a:off x="6080760" y="1828800"/>
+            <a:ext cx="2606040" cy="365760"/>
+          </a:xfrm>
+          <a:prstGeom prst="line">
+            <a:avLst/>
+          </a:prstGeom>
+          <a:ln w="25400">
+            <a:solidFill>
+              <a:srgbClr val="C53E1F"/>
+            </a:solidFill>
+          </a:ln>
+          <a:effectLst/>
+        </p:spPr>
+        <p:style>
+          <a:lnRef idx="2">
+            <a:schemeClr val="accent1"/>
+          </a:lnRef>
+          <a:fillRef idx="0">
+            <a:schemeClr val="accent1"/>
+          </a:fillRef>
+          <a:effectRef idx="1">
+            <a:schemeClr val="accent1"/>
+          </a:effectRef>
+          <a:fontRef idx="minor">
+            <a:schemeClr val="tx1"/>
+          </a:fontRef>
+        </p:style>
+      </p:cxnSp>
+      <p:sp>
+        <p:nvSpPr>
+          <p:cNvPr id="10" name="Rectangle 9"/>
+          <p:cNvSpPr/>
+          <p:nvPr/>
+        </p:nvSpPr>
+        <p:spPr>
+          <a:xfrm>
+            <a:off x="1371600" y="2194560"/>
+            <a:ext cx="4389120" cy="2560320"/>
+          </a:xfrm>
+          <a:prstGeom prst="rect">
+            <a:avLst/>
+          </a:prstGeom>
+          <a:solidFill>
+            <a:srgbClr val="9FC9BE"/>
+          </a:solidFill>
+          <a:ln w="12700">
+            <a:solidFill>
+              <a:srgbClr val="0A7D6E"/>
+            </a:solidFill>
+          </a:ln>
+          <a:effectLst/>
+        </p:spPr>
+        <p:style>
+          <a:lnRef idx="1">
+            <a:schemeClr val="accent1"/>
+          </a:lnRef>
+          <a:fillRef idx="3">
+            <a:schemeClr val="accent1"/>
+          </a:fillRef>
+          <a:effectRef idx="2">
+            <a:schemeClr val="accent1"/>
+          </a:effectRef>
+          <a:fontRef idx="minor">
+            <a:schemeClr val="lt1"/>
+          </a:fontRef>
+        </p:style>
+        <p:txBody>
+          <a:bodyPr rtlCol="0" anchor="ctr"/>
+          <a:lstStyle/>
+          <a:p>
+            <a:pPr algn="ctr"/>
+          </a:p>
+        </p:txBody>
+      </p:sp>
+      <p:sp>
+        <p:nvSpPr>
+          <p:cNvPr id="11" name="TextBox 10"/>
+          <p:cNvSpPr txBox="1"/>
+          <p:nvPr/>
+        </p:nvSpPr>
+        <p:spPr>
+          <a:xfrm>
+            <a:off x="1444752" y="2267712"/>
+            <a:ext cx="4242816" cy="256032"/>
+          </a:xfrm>
+          <a:prstGeom prst="rect">
+            <a:avLst/>
+          </a:prstGeom>
+          <a:noFill/>
+          <a:effectLst/>
+        </p:spPr>
+        <p:txBody>
+          <a:bodyPr wrap="square" lIns="0" rIns="0" tIns="0" bIns="0" anchor="ctr">
+            <a:spAutoFit/>
+          </a:bodyPr>
+          <a:lstStyle/>
+          <a:p>
+            <a:pPr algn="ctr"/>
+            <a:r>
+              <a:rPr sz="1100" b="1" i="0">
+                <a:solidFill>
+                  <a:srgbClr val="222222"/>
+                </a:solidFill>
+                <a:latin typeface="Arial"/>
+              </a:rPr>
+              <a:t>PRIMARY META (N = 518)</a:t>
+            </a:r>
+          </a:p>
+        </p:txBody>
+      </p:sp>
+      <p:sp>
+        <p:nvSpPr>
+          <p:cNvPr id="12" name="TextBox 11"/>
+          <p:cNvSpPr txBox="1"/>
+          <p:nvPr/>
+        </p:nvSpPr>
+        <p:spPr>
+          <a:xfrm>
+            <a:off x="1444752" y="2523744"/>
+            <a:ext cx="4242816" cy="256032"/>
+          </a:xfrm>
+          <a:prstGeom prst="rect">
+            <a:avLst/>
+          </a:prstGeom>
+          <a:noFill/>
+          <a:effectLst/>
+        </p:spPr>
+        <p:txBody>
+          <a:bodyPr wrap="square" lIns="0" rIns="0" tIns="0" bIns="0" anchor="ctr">
+            <a:spAutoFit/>
+          </a:bodyPr>
+          <a:lstStyle/>
+          <a:p>
+            <a:pPr algn="ctr"/>
+            <a:r>
+              <a:rPr sz="900" b="0" i="0">
+                <a:solidFill>
+                  <a:srgbClr val="222222"/>
+                </a:solidFill>
+                <a:latin typeface="Arial"/>
+              </a:rPr>
+              <a:t>5 LC-CRT cohorts, concurrent capecitabine</a:t>
+            </a:r>
+          </a:p>
+        </p:txBody>
+      </p:sp>
+      <p:sp>
+        <p:nvSpPr>
+          <p:cNvPr id="13" name="TextBox 12"/>
+          <p:cNvSpPr txBox="1"/>
+          <p:nvPr/>
+        </p:nvSpPr>
+        <p:spPr>
+          <a:xfrm>
+            <a:off x="1444752" y="2779776"/>
+            <a:ext cx="4242816" cy="256032"/>
+          </a:xfrm>
+          <a:prstGeom prst="rect">
+            <a:avLst/>
+          </a:prstGeom>
+          <a:noFill/>
+          <a:effectLst/>
+        </p:spPr>
+        <p:txBody>
+          <a:bodyPr wrap="square" lIns="0" rIns="0" tIns="0" bIns="0" anchor="ctr">
+            <a:spAutoFit/>
+          </a:bodyPr>
+          <a:lstStyle/>
+          <a:p>
+            <a:pPr algn="ctr"/>
+            <a:r>
+              <a:rPr sz="900" b="0" i="0">
+                <a:solidFill>
+                  <a:srgbClr val="222222"/>
+                </a:solidFill>
+                <a:latin typeface="Arial"/>
+              </a:rPr>
+              <a:t>≥ 3 / 4 Thread-1 signature concordance</a:t>
+            </a:r>
+          </a:p>
+        </p:txBody>
+      </p:sp>
+      <p:sp>
+        <p:nvSpPr>
+          <p:cNvPr id="14" name="TextBox 13"/>
+          <p:cNvSpPr txBox="1"/>
+          <p:nvPr/>
+        </p:nvSpPr>
+        <p:spPr>
+          <a:xfrm>
+            <a:off x="1444752" y="3035808"/>
+            <a:ext cx="4242816" cy="256032"/>
+          </a:xfrm>
+          <a:prstGeom prst="rect">
+            <a:avLst/>
+          </a:prstGeom>
+          <a:noFill/>
+          <a:effectLst/>
+        </p:spPr>
+        <p:txBody>
+          <a:bodyPr wrap="square" lIns="0" rIns="0" tIns="0" bIns="0" anchor="ctr">
+            <a:spAutoFit/>
+          </a:bodyPr>
+          <a:lstStyle/>
+          <a:p>
+            <a:pPr algn="ctr"/>
+            <a:r>
+              <a:rPr sz="900" b="0" i="0">
+                <a:solidFill>
+                  <a:srgbClr val="222222"/>
+                </a:solidFill>
+                <a:latin typeface="Arial"/>
+              </a:rPr>
+              <a:t/>
+            </a:r>
+          </a:p>
+        </p:txBody>
+      </p:sp>
+      <p:sp>
+        <p:nvSpPr>
+          <p:cNvPr id="15" name="TextBox 14"/>
+          <p:cNvSpPr txBox="1"/>
+          <p:nvPr/>
+        </p:nvSpPr>
+        <p:spPr>
+          <a:xfrm>
+            <a:off x="1444752" y="3291840"/>
+            <a:ext cx="4242816" cy="256032"/>
+          </a:xfrm>
+          <a:prstGeom prst="rect">
+            <a:avLst/>
+          </a:prstGeom>
+          <a:noFill/>
+          <a:effectLst/>
+        </p:spPr>
+        <p:txBody>
+          <a:bodyPr wrap="square" lIns="0" rIns="0" tIns="0" bIns="0" anchor="ctr">
+            <a:spAutoFit/>
+          </a:bodyPr>
+          <a:lstStyle/>
+          <a:p>
+            <a:pPr algn="ctr"/>
+            <a:r>
+              <a:rPr sz="900" b="0" i="0">
+                <a:solidFill>
+                  <a:srgbClr val="222222"/>
+                </a:solidFill>
+                <a:latin typeface="Arial"/>
+              </a:rPr>
+              <a:t>GSE35452 (N=46), GSE45404 (80),</a:t>
+            </a:r>
+          </a:p>
+        </p:txBody>
+      </p:sp>
+      <p:sp>
+        <p:nvSpPr>
+          <p:cNvPr id="16" name="TextBox 15"/>
+          <p:cNvSpPr txBox="1"/>
+          <p:nvPr/>
+        </p:nvSpPr>
+        <p:spPr>
+          <a:xfrm>
+            <a:off x="1444752" y="3547872"/>
+            <a:ext cx="4242816" cy="256032"/>
+          </a:xfrm>
+          <a:prstGeom prst="rect">
+            <a:avLst/>
+          </a:prstGeom>
+          <a:noFill/>
+          <a:effectLst/>
+        </p:spPr>
+        <p:txBody>
+          <a:bodyPr wrap="square" lIns="0" rIns="0" tIns="0" bIns="0" anchor="ctr">
+            <a:spAutoFit/>
+          </a:bodyPr>
+          <a:lstStyle/>
+          <a:p>
+            <a:pPr algn="ctr"/>
+            <a:r>
+              <a:rPr sz="900" b="0" i="0">
+                <a:solidFill>
+                  <a:srgbClr val="222222"/>
+                </a:solidFill>
+                <a:latin typeface="Arial"/>
+              </a:rPr>
+              <a:t>GSE56699 (72), GSE133057 (33),</a:t>
+            </a:r>
+          </a:p>
+        </p:txBody>
+      </p:sp>
+      <p:sp>
+        <p:nvSpPr>
+          <p:cNvPr id="17" name="TextBox 16"/>
+          <p:cNvSpPr txBox="1"/>
+          <p:nvPr/>
+        </p:nvSpPr>
+        <p:spPr>
+          <a:xfrm>
+            <a:off x="1444752" y="3803904"/>
+            <a:ext cx="4242816" cy="256032"/>
+          </a:xfrm>
+          <a:prstGeom prst="rect">
+            <a:avLst/>
+          </a:prstGeom>
+          <a:noFill/>
+          <a:effectLst/>
+        </p:spPr>
+        <p:txBody>
+          <a:bodyPr wrap="square" lIns="0" rIns="0" tIns="0" bIns="0" anchor="ctr">
+            <a:spAutoFit/>
+          </a:bodyPr>
+          <a:lstStyle/>
+          <a:p>
+            <a:pPr algn="ctr"/>
+            <a:r>
+              <a:rPr sz="900" b="0" i="0">
+                <a:solidFill>
+                  <a:srgbClr val="222222"/>
+                </a:solidFill>
+                <a:latin typeface="Arial"/>
+              </a:rPr>
+              <a:t>GSE87211 (287)</a:t>
+            </a:r>
+          </a:p>
+        </p:txBody>
+      </p:sp>
+      <p:sp>
+        <p:nvSpPr>
+          <p:cNvPr id="18" name="TextBox 17"/>
+          <p:cNvSpPr txBox="1"/>
+          <p:nvPr/>
+        </p:nvSpPr>
+        <p:spPr>
+          <a:xfrm>
+            <a:off x="1444752" y="4059936"/>
+            <a:ext cx="4242816" cy="256032"/>
+          </a:xfrm>
+          <a:prstGeom prst="rect">
+            <a:avLst/>
+          </a:prstGeom>
+          <a:noFill/>
+          <a:effectLst/>
+        </p:spPr>
+        <p:txBody>
+          <a:bodyPr wrap="square" lIns="0" rIns="0" tIns="0" bIns="0" anchor="ctr">
+            <a:spAutoFit/>
+          </a:bodyPr>
+          <a:lstStyle/>
+          <a:p>
+            <a:pPr algn="ctr"/>
+            <a:r>
+              <a:rPr sz="900" b="0" i="0">
+                <a:solidFill>
+                  <a:srgbClr val="222222"/>
+                </a:solidFill>
+                <a:latin typeface="Arial"/>
+              </a:rPr>
+              <a:t/>
+            </a:r>
+          </a:p>
+        </p:txBody>
+      </p:sp>
+      <p:sp>
+        <p:nvSpPr>
+          <p:cNvPr id="19" name="TextBox 18"/>
+          <p:cNvSpPr txBox="1"/>
+          <p:nvPr/>
+        </p:nvSpPr>
+        <p:spPr>
+          <a:xfrm>
+            <a:off x="1444752" y="4315968"/>
+            <a:ext cx="4242816" cy="256032"/>
+          </a:xfrm>
+          <a:prstGeom prst="rect">
+            <a:avLst/>
+          </a:prstGeom>
+          <a:noFill/>
+          <a:effectLst/>
+        </p:spPr>
+        <p:txBody>
+          <a:bodyPr wrap="square" lIns="0" rIns="0" tIns="0" bIns="0" anchor="ctr">
+            <a:spAutoFit/>
+          </a:bodyPr>
+          <a:lstStyle/>
+          <a:p>
+            <a:pPr algn="ctr"/>
+            <a:r>
+              <a:rPr sz="900" b="0" i="0">
+                <a:solidFill>
+                  <a:srgbClr val="222222"/>
+                </a:solidFill>
+                <a:latin typeface="Arial"/>
+              </a:rPr>
+              <a:t>Restricted Z: DSB +3.17, cellcycle +3.21,</a:t>
+            </a:r>
+          </a:p>
+        </p:txBody>
+      </p:sp>
+      <p:sp>
+        <p:nvSpPr>
+          <p:cNvPr id="20" name="TextBox 19"/>
+          <p:cNvSpPr txBox="1"/>
+          <p:nvPr/>
+        </p:nvSpPr>
+        <p:spPr>
+          <a:xfrm>
+            <a:off x="1444752" y="4572000"/>
+            <a:ext cx="4242816" cy="256032"/>
+          </a:xfrm>
+          <a:prstGeom prst="rect">
+            <a:avLst/>
+          </a:prstGeom>
+          <a:noFill/>
+          <a:effectLst/>
+        </p:spPr>
+        <p:txBody>
+          <a:bodyPr wrap="square" lIns="0" rIns="0" tIns="0" bIns="0" anchor="ctr">
+            <a:spAutoFit/>
+          </a:bodyPr>
+          <a:lstStyle/>
+          <a:p>
+            <a:pPr algn="ctr"/>
+            <a:r>
+              <a:rPr sz="900" b="0" i="0">
+                <a:solidFill>
+                  <a:srgbClr val="222222"/>
+                </a:solidFill>
+                <a:latin typeface="Arial"/>
+              </a:rPr>
+              <a:t>E2F/MYC +2.79 (all P &lt; 0.01)</a:t>
+            </a:r>
+          </a:p>
+        </p:txBody>
+      </p:sp>
+      <p:sp>
+        <p:nvSpPr>
+          <p:cNvPr id="21" name="Rectangle 20"/>
+          <p:cNvSpPr/>
+          <p:nvPr/>
+        </p:nvSpPr>
+        <p:spPr>
+          <a:xfrm>
+            <a:off x="6400800" y="2194560"/>
+            <a:ext cx="4572000" cy="2560320"/>
+          </a:xfrm>
+          <a:prstGeom prst="rect">
+            <a:avLst/>
+          </a:prstGeom>
+          <a:solidFill>
+            <a:srgbClr val="E9AE9B"/>
+          </a:solidFill>
+          <a:ln w="12700">
+            <a:solidFill>
+              <a:srgbClr val="C53E1F"/>
+            </a:solidFill>
+          </a:ln>
+          <a:effectLst/>
+        </p:spPr>
+        <p:style>
+          <a:lnRef idx="1">
+            <a:schemeClr val="accent1"/>
+          </a:lnRef>
+          <a:fillRef idx="3">
+            <a:schemeClr val="accent1"/>
+          </a:fillRef>
+          <a:effectRef idx="2">
+            <a:schemeClr val="accent1"/>
+          </a:effectRef>
+          <a:fontRef idx="minor">
+            <a:schemeClr val="lt1"/>
+          </a:fontRef>
+        </p:style>
+        <p:txBody>
+          <a:bodyPr rtlCol="0" anchor="ctr"/>
+          <a:lstStyle/>
+          <a:p>
+            <a:pPr algn="ctr"/>
+          </a:p>
+        </p:txBody>
+      </p:sp>
+      <p:sp>
+        <p:nvSpPr>
+          <p:cNvPr id="22" name="TextBox 21"/>
+          <p:cNvSpPr txBox="1"/>
+          <p:nvPr/>
+        </p:nvSpPr>
+        <p:spPr>
+          <a:xfrm>
+            <a:off x="6473952" y="2267712"/>
+            <a:ext cx="4425696" cy="256032"/>
+          </a:xfrm>
+          <a:prstGeom prst="rect">
+            <a:avLst/>
+          </a:prstGeom>
+          <a:noFill/>
+          <a:effectLst/>
+        </p:spPr>
+        <p:txBody>
+          <a:bodyPr wrap="square" lIns="0" rIns="0" tIns="0" bIns="0" anchor="ctr">
+            <a:spAutoFit/>
+          </a:bodyPr>
+          <a:lstStyle/>
+          <a:p>
+            <a:pPr algn="ctr"/>
+            <a:r>
+              <a:rPr sz="1100" b="1" i="0">
+                <a:solidFill>
+                  <a:srgbClr val="222222"/>
+                </a:solidFill>
+                <a:latin typeface="Arial"/>
+              </a:rPr>
+              <a:t>EXCLUDED (N = 203)</a:t>
+            </a:r>
+          </a:p>
+        </p:txBody>
+      </p:sp>
+      <p:sp>
+        <p:nvSpPr>
+          <p:cNvPr id="23" name="TextBox 22"/>
+          <p:cNvSpPr txBox="1"/>
+          <p:nvPr/>
+        </p:nvSpPr>
+        <p:spPr>
+          <a:xfrm>
+            <a:off x="6473952" y="2523744"/>
+            <a:ext cx="4425696" cy="256032"/>
+          </a:xfrm>
+          <a:prstGeom prst="rect">
+            <a:avLst/>
+          </a:prstGeom>
+          <a:noFill/>
+          <a:effectLst/>
+        </p:spPr>
+        <p:txBody>
+          <a:bodyPr wrap="square" lIns="0" rIns="0" tIns="0" bIns="0" anchor="ctr">
+            <a:spAutoFit/>
+          </a:bodyPr>
+          <a:lstStyle/>
+          <a:p>
+            <a:pPr algn="ctr"/>
+            <a:r>
+              <a:rPr sz="900" b="0" i="0">
+                <a:solidFill>
+                  <a:srgbClr val="222222"/>
+                </a:solidFill>
+                <a:latin typeface="Arial"/>
+              </a:rPr>
+              <a:t/>
+            </a:r>
+          </a:p>
+        </p:txBody>
+      </p:sp>
+      <p:sp>
+        <p:nvSpPr>
+          <p:cNvPr id="24" name="TextBox 23"/>
+          <p:cNvSpPr txBox="1"/>
+          <p:nvPr/>
+        </p:nvSpPr>
+        <p:spPr>
+          <a:xfrm>
+            <a:off x="6473952" y="2779776"/>
+            <a:ext cx="4425696" cy="256032"/>
+          </a:xfrm>
+          <a:prstGeom prst="rect">
+            <a:avLst/>
+          </a:prstGeom>
+          <a:noFill/>
+          <a:effectLst/>
+        </p:spPr>
+        <p:txBody>
+          <a:bodyPr wrap="square" lIns="0" rIns="0" tIns="0" bIns="0" anchor="ctr">
+            <a:spAutoFit/>
+          </a:bodyPr>
+          <a:lstStyle/>
+          <a:p>
+            <a:pPr algn="ctr"/>
+            <a:r>
+              <a:rPr sz="900" b="0" i="0">
+                <a:solidFill>
+                  <a:srgbClr val="222222"/>
+                </a:solidFill>
+                <a:latin typeface="Arial"/>
+              </a:rPr>
+              <a:t>✗ GSE119409 (66): RT-alone, no chemo</a:t>
+            </a:r>
+          </a:p>
+        </p:txBody>
+      </p:sp>
+      <p:sp>
+        <p:nvSpPr>
+          <p:cNvPr id="25" name="TextBox 24"/>
+          <p:cNvSpPr txBox="1"/>
+          <p:nvPr/>
+        </p:nvSpPr>
+        <p:spPr>
+          <a:xfrm>
+            <a:off x="6473952" y="3035808"/>
+            <a:ext cx="4425696" cy="256032"/>
+          </a:xfrm>
+          <a:prstGeom prst="rect">
+            <a:avLst/>
+          </a:prstGeom>
+          <a:noFill/>
+          <a:effectLst/>
+        </p:spPr>
+        <p:txBody>
+          <a:bodyPr wrap="square" lIns="0" rIns="0" tIns="0" bIns="0" anchor="ctr">
+            <a:spAutoFit/>
+          </a:bodyPr>
+          <a:lstStyle/>
+          <a:p>
+            <a:pPr algn="ctr"/>
+            <a:r>
+              <a:rPr sz="900" b="0" i="0">
+                <a:solidFill>
+                  <a:srgbClr val="222222"/>
+                </a:solidFill>
+                <a:latin typeface="Arial"/>
+              </a:rPr>
+              <a:t>✗ GSE94104 (80): no response endpoint</a:t>
+            </a:r>
+          </a:p>
+        </p:txBody>
+      </p:sp>
+      <p:sp>
+        <p:nvSpPr>
+          <p:cNvPr id="26" name="TextBox 25"/>
+          <p:cNvSpPr txBox="1"/>
+          <p:nvPr/>
+        </p:nvSpPr>
+        <p:spPr>
+          <a:xfrm>
+            <a:off x="6473952" y="3291840"/>
+            <a:ext cx="4425696" cy="256032"/>
+          </a:xfrm>
+          <a:prstGeom prst="rect">
+            <a:avLst/>
+          </a:prstGeom>
+          <a:noFill/>
+          <a:effectLst/>
+        </p:spPr>
+        <p:txBody>
+          <a:bodyPr wrap="square" lIns="0" rIns="0" tIns="0" bIns="0" anchor="ctr">
+            <a:spAutoFit/>
+          </a:bodyPr>
+          <a:lstStyle/>
+          <a:p>
+            <a:pPr algn="ctr"/>
+            <a:r>
+              <a:rPr sz="900" b="0" i="0">
+                <a:solidFill>
+                  <a:srgbClr val="222222"/>
+                </a:solidFill>
+                <a:latin typeface="Arial"/>
+              </a:rPr>
+              <a:t>✗ GSE150082 (39): SC-RT mixed regimen</a:t>
+            </a:r>
+          </a:p>
+        </p:txBody>
+      </p:sp>
+      <p:sp>
+        <p:nvSpPr>
+          <p:cNvPr id="27" name="TextBox 26"/>
+          <p:cNvSpPr txBox="1"/>
+          <p:nvPr/>
+        </p:nvSpPr>
+        <p:spPr>
+          <a:xfrm>
+            <a:off x="6473952" y="3547872"/>
+            <a:ext cx="4425696" cy="256032"/>
+          </a:xfrm>
+          <a:prstGeom prst="rect">
+            <a:avLst/>
+          </a:prstGeom>
+          <a:noFill/>
+          <a:effectLst/>
+        </p:spPr>
+        <p:txBody>
+          <a:bodyPr wrap="square" lIns="0" rIns="0" tIns="0" bIns="0" anchor="ctr">
+            <a:spAutoFit/>
+          </a:bodyPr>
+          <a:lstStyle/>
+          <a:p>
+            <a:pPr algn="ctr"/>
+            <a:r>
+              <a:rPr sz="900" b="0" i="0">
+                <a:solidFill>
+                  <a:srgbClr val="222222"/>
+                </a:solidFill>
+                <a:latin typeface="Arial"/>
+              </a:rPr>
+              <a:t>✗ GSE46862 (69): 1/4 Thread-1 concord</a:t>
+            </a:r>
+          </a:p>
+        </p:txBody>
+      </p:sp>
+      <p:sp>
+        <p:nvSpPr>
+          <p:cNvPr id="28" name="TextBox 27"/>
+          <p:cNvSpPr txBox="1"/>
+          <p:nvPr/>
+        </p:nvSpPr>
+        <p:spPr>
+          <a:xfrm>
+            <a:off x="6473952" y="3803904"/>
+            <a:ext cx="4425696" cy="256032"/>
+          </a:xfrm>
+          <a:prstGeom prst="rect">
+            <a:avLst/>
+          </a:prstGeom>
+          <a:noFill/>
+          <a:effectLst/>
+        </p:spPr>
+        <p:txBody>
+          <a:bodyPr wrap="square" lIns="0" rIns="0" tIns="0" bIns="0" anchor="ctr">
+            <a:spAutoFit/>
+          </a:bodyPr>
+          <a:lstStyle/>
+          <a:p>
+            <a:pPr algn="ctr"/>
+            <a:r>
+              <a:rPr sz="900" b="0" i="0">
+                <a:solidFill>
+                  <a:srgbClr val="222222"/>
+                </a:solidFill>
+                <a:latin typeface="Arial"/>
+              </a:rPr>
+              <a:t/>
+            </a:r>
+          </a:p>
+        </p:txBody>
+      </p:sp>
+      <p:sp>
+        <p:nvSpPr>
+          <p:cNvPr id="29" name="TextBox 28"/>
+          <p:cNvSpPr txBox="1"/>
+          <p:nvPr/>
+        </p:nvSpPr>
+        <p:spPr>
+          <a:xfrm>
+            <a:off x="6473952" y="4059936"/>
+            <a:ext cx="4425696" cy="256032"/>
+          </a:xfrm>
+          <a:prstGeom prst="rect">
+            <a:avLst/>
+          </a:prstGeom>
+          <a:noFill/>
+          <a:effectLst/>
+        </p:spPr>
+        <p:txBody>
+          <a:bodyPr wrap="square" lIns="0" rIns="0" tIns="0" bIns="0" anchor="ctr">
+            <a:spAutoFit/>
+          </a:bodyPr>
+          <a:lstStyle/>
+          <a:p>
+            <a:pPr algn="ctr"/>
+            <a:r>
+              <a:rPr sz="900" b="0" i="0">
+                <a:solidFill>
+                  <a:srgbClr val="222222"/>
+                </a:solidFill>
+                <a:latin typeface="Arial"/>
+              </a:rPr>
+              <a:t>Full 9-cohort sensitivity meta shown</a:t>
+            </a:r>
+          </a:p>
+        </p:txBody>
+      </p:sp>
+      <p:sp>
+        <p:nvSpPr>
+          <p:cNvPr id="30" name="TextBox 29"/>
+          <p:cNvSpPr txBox="1"/>
+          <p:nvPr/>
+        </p:nvSpPr>
+        <p:spPr>
+          <a:xfrm>
+            <a:off x="6473952" y="4315968"/>
+            <a:ext cx="4425696" cy="256032"/>
+          </a:xfrm>
+          <a:prstGeom prst="rect">
+            <a:avLst/>
+          </a:prstGeom>
+          <a:noFill/>
+          <a:effectLst/>
+        </p:spPr>
+        <p:txBody>
+          <a:bodyPr wrap="square" lIns="0" rIns="0" tIns="0" bIns="0" anchor="ctr">
+            <a:spAutoFit/>
+          </a:bodyPr>
+          <a:lstStyle/>
+          <a:p>
+            <a:pPr algn="ctr"/>
+            <a:r>
+              <a:rPr sz="900" b="0" i="0">
+                <a:solidFill>
+                  <a:srgbClr val="222222"/>
+                </a:solidFill>
+                <a:latin typeface="Arial"/>
+              </a:rPr>
+              <a:t>in Supp Fig S19A (hollow diamond)</a:t>
+            </a:r>
+          </a:p>
+        </p:txBody>
+      </p:sp>
+      <p:sp>
+        <p:nvSpPr>
+          <p:cNvPr id="31" name="Rectangle 30"/>
+          <p:cNvSpPr/>
+          <p:nvPr/>
+        </p:nvSpPr>
+        <p:spPr>
+          <a:xfrm>
+            <a:off x="2286000" y="2011680"/>
+            <a:ext cx="1188720" cy="219456"/>
+          </a:xfrm>
+          <a:prstGeom prst="rect">
+            <a:avLst/>
+          </a:prstGeom>
+          <a:solidFill>
+            <a:srgbClr val="0A7D6E"/>
+          </a:solidFill>
+          <a:ln w="10160">
+            <a:solidFill>
+              <a:srgbClr val="222222"/>
+            </a:solidFill>
+          </a:ln>
+          <a:effectLst/>
+        </p:spPr>
+        <p:style>
+          <a:lnRef idx="1">
+            <a:schemeClr val="accent1"/>
+          </a:lnRef>
+          <a:fillRef idx="3">
+            <a:schemeClr val="accent1"/>
+          </a:fillRef>
+          <a:effectRef idx="2">
+            <a:schemeClr val="accent1"/>
+          </a:effectRef>
+          <a:fontRef idx="minor">
+            <a:schemeClr val="lt1"/>
+          </a:fontRef>
+        </p:style>
+        <p:txBody>
+          <a:bodyPr rtlCol="0" anchor="ctr"/>
+          <a:lstStyle/>
+          <a:p>
+            <a:pPr algn="ctr"/>
+          </a:p>
+        </p:txBody>
+      </p:sp>
+      <p:sp>
+        <p:nvSpPr>
+          <p:cNvPr id="32" name="TextBox 31"/>
+          <p:cNvSpPr txBox="1"/>
+          <p:nvPr/>
+        </p:nvSpPr>
+        <p:spPr>
+          <a:xfrm>
+            <a:off x="2286000" y="2011680"/>
+            <a:ext cx="1188720" cy="219456"/>
+          </a:xfrm>
+          <a:prstGeom prst="rect">
+            <a:avLst/>
+          </a:prstGeom>
+          <a:noFill/>
+          <a:effectLst/>
+        </p:spPr>
+        <p:txBody>
+          <a:bodyPr wrap="square" lIns="0" rIns="0" tIns="0" bIns="0" anchor="ctr">
+            <a:spAutoFit/>
+          </a:bodyPr>
+          <a:lstStyle/>
+          <a:p>
+            <a:pPr algn="ctr"/>
+            <a:r>
+              <a:rPr sz="900" b="1" i="0">
+                <a:solidFill>
+                  <a:srgbClr val="FFFFFF"/>
+                </a:solidFill>
+                <a:latin typeface="Arial"/>
+              </a:rPr>
+              <a:t>N = 518 included</a:t>
+            </a:r>
+          </a:p>
+        </p:txBody>
+      </p:sp>
+      <p:sp>
+        <p:nvSpPr>
+          <p:cNvPr id="33" name="Rectangle 32"/>
+          <p:cNvSpPr/>
+          <p:nvPr/>
+        </p:nvSpPr>
+        <p:spPr>
+          <a:xfrm>
+            <a:off x="8412480" y="2011680"/>
+            <a:ext cx="1188720" cy="219456"/>
+          </a:xfrm>
+          <a:prstGeom prst="rect">
+            <a:avLst/>
+          </a:prstGeom>
+          <a:solidFill>
+            <a:srgbClr val="C53E1F"/>
+          </a:solidFill>
+          <a:ln w="10160">
+            <a:solidFill>
+              <a:srgbClr val="222222"/>
+            </a:solidFill>
+          </a:ln>
+          <a:effectLst/>
+        </p:spPr>
+        <p:style>
+          <a:lnRef idx="1">
+            <a:schemeClr val="accent1"/>
+          </a:lnRef>
+          <a:fillRef idx="3">
+            <a:schemeClr val="accent1"/>
+          </a:fillRef>
+          <a:effectRef idx="2">
+            <a:schemeClr val="accent1"/>
+          </a:effectRef>
+          <a:fontRef idx="minor">
+            <a:schemeClr val="lt1"/>
+          </a:fontRef>
+        </p:style>
+        <p:txBody>
+          <a:bodyPr rtlCol="0" anchor="ctr"/>
+          <a:lstStyle/>
+          <a:p>
+            <a:pPr algn="ctr"/>
+          </a:p>
+        </p:txBody>
+      </p:sp>
+      <p:sp>
+        <p:nvSpPr>
+          <p:cNvPr id="34" name="TextBox 33"/>
+          <p:cNvSpPr txBox="1"/>
+          <p:nvPr/>
+        </p:nvSpPr>
+        <p:spPr>
+          <a:xfrm>
+            <a:off x="8412480" y="2011680"/>
+            <a:ext cx="1188720" cy="219456"/>
+          </a:xfrm>
+          <a:prstGeom prst="rect">
+            <a:avLst/>
+          </a:prstGeom>
+          <a:noFill/>
+          <a:effectLst/>
+        </p:spPr>
+        <p:txBody>
+          <a:bodyPr wrap="square" lIns="0" rIns="0" tIns="0" bIns="0" anchor="ctr">
+            <a:spAutoFit/>
+          </a:bodyPr>
+          <a:lstStyle/>
+          <a:p>
+            <a:pPr algn="ctr"/>
+            <a:r>
+              <a:rPr sz="900" b="1" i="0">
+                <a:solidFill>
+                  <a:srgbClr val="FFFFFF"/>
+                </a:solidFill>
+                <a:latin typeface="Arial"/>
+              </a:rPr>
+              <a:t>N = 203 excluded</a:t>
+            </a:r>
+          </a:p>
+        </p:txBody>
+      </p:sp>
+      <p:cxnSp>
+        <p:nvCxnSpPr>
+          <p:cNvPr id="35" name="Connector 34"/>
+          <p:cNvCxnSpPr/>
+          <p:nvPr/>
+        </p:nvCxnSpPr>
+        <p:spPr>
+          <a:xfrm>
+            <a:off x="3566160" y="4754880"/>
+            <a:ext cx="0" cy="365760"/>
+          </a:xfrm>
+          <a:prstGeom prst="line">
+            <a:avLst/>
+          </a:prstGeom>
+          <a:ln w="44450">
+            <a:solidFill>
+              <a:srgbClr val="D4A300"/>
+            </a:solidFill>
+          </a:ln>
+          <a:effectLst/>
+        </p:spPr>
+        <p:style>
+          <a:lnRef idx="2">
+            <a:schemeClr val="accent1"/>
+          </a:lnRef>
+          <a:fillRef idx="0">
+            <a:schemeClr val="accent1"/>
+          </a:fillRef>
+          <a:effectRef idx="1">
+            <a:schemeClr val="accent1"/>
+          </a:effectRef>
+          <a:fontRef idx="minor">
+            <a:schemeClr val="tx1"/>
+          </a:fontRef>
+        </p:style>
+      </p:cxnSp>
+      <p:sp>
+        <p:nvSpPr>
+          <p:cNvPr id="36" name="Rectangle 35"/>
           <p:cNvSpPr/>
           <p:nvPr/>
         </p:nvSpPr>
@@ -9186,7 +9458,7 @@
       </p:sp>
       <p:sp>
         <p:nvSpPr>
-          <p:cNvPr id="30" name="TextBox 29"/>
+          <p:cNvPr id="37" name="TextBox 36"/>
           <p:cNvSpPr txBox="1"/>
           <p:nvPr/>
         </p:nvSpPr>
@@ -9209,20 +9481,20 @@
           <a:p>
             <a:pPr algn="ctr"/>
             <a:r>
-              <a:rPr sz="1000" b="1" i="0">
+              <a:rPr sz="1100" b="1" i="0">
                 <a:solidFill>
                   <a:srgbClr val="222222"/>
                 </a:solidFill>
                 <a:latin typeface="Arial"/>
               </a:rPr>
-              <a:t>Thread 2 augmentation — +Akiyoshi 2023</a:t>
-            </a:r>
-          </a:p>
-        </p:txBody>
-      </p:sp>
-      <p:sp>
-        <p:nvSpPr>
-          <p:cNvPr id="31" name="TextBox 30"/>
+              <a:t>Thread 2 +Akiyoshi augmentation</a:t>
+            </a:r>
+          </a:p>
+        </p:txBody>
+      </p:sp>
+      <p:sp>
+        <p:nvSpPr>
+          <p:cNvPr id="38" name="TextBox 37"/>
           <p:cNvSpPr txBox="1"/>
           <p:nvPr/>
         </p:nvSpPr>
@@ -9258,7 +9530,7 @@
       </p:sp>
       <p:sp>
         <p:nvSpPr>
-          <p:cNvPr id="32" name="TextBox 31"/>
+          <p:cNvPr id="39" name="TextBox 38"/>
           <p:cNvSpPr txBox="1"/>
           <p:nvPr/>
         </p:nvSpPr>
@@ -9292,42 +9564,50 @@
           </a:p>
         </p:txBody>
       </p:sp>
-      <p:cxnSp>
-        <p:nvCxnSpPr>
-          <p:cNvPr id="33" name="Connector 32"/>
-          <p:cNvCxnSpPr/>
-          <p:nvPr/>
-        </p:nvCxnSpPr>
-        <p:spPr>
-          <a:xfrm>
-            <a:off x="3566160" y="4754880"/>
-            <a:ext cx="0" cy="365760"/>
-          </a:xfrm>
-          <a:prstGeom prst="line">
-            <a:avLst/>
-          </a:prstGeom>
-          <a:ln w="12700">
-            <a:solidFill>
-              <a:srgbClr val="222222"/>
-            </a:solidFill>
+      <p:sp>
+        <p:nvSpPr>
+          <p:cNvPr id="40" name="5-Point Star 39"/>
+          <p:cNvSpPr/>
+          <p:nvPr/>
+        </p:nvSpPr>
+        <p:spPr>
+          <a:xfrm>
+            <a:off x="3227832" y="5221224"/>
+            <a:ext cx="164592" cy="164592"/>
+          </a:xfrm>
+          <a:prstGeom prst="star5">
+            <a:avLst/>
+          </a:prstGeom>
+          <a:solidFill>
+            <a:srgbClr val="D4A300"/>
+          </a:solidFill>
+          <a:ln>
+            <a:noFill/>
           </a:ln>
           <a:effectLst/>
         </p:spPr>
         <p:style>
-          <a:lnRef idx="2">
+          <a:lnRef idx="1">
             <a:schemeClr val="accent1"/>
           </a:lnRef>
-          <a:fillRef idx="0">
+          <a:fillRef idx="3">
             <a:schemeClr val="accent1"/>
           </a:fillRef>
-          <a:effectRef idx="1">
+          <a:effectRef idx="2">
             <a:schemeClr val="accent1"/>
           </a:effectRef>
           <a:fontRef idx="minor">
-            <a:schemeClr val="tx1"/>
+            <a:schemeClr val="lt1"/>
           </a:fontRef>
         </p:style>
-      </p:cxnSp>
+        <p:txBody>
+          <a:bodyPr rtlCol="0" anchor="ctr"/>
+          <a:lstStyle/>
+          <a:p>
+            <a:pPr algn="ctr"/>
+          </a:p>
+        </p:txBody>
+      </p:sp>
     </p:spTree>
   </p:cSld>
   <p:clrMapOvr>
